--- a/Documentos/Entrega 2/Inovação e Empreendedorismo/Entrega 2 - Inovação e Empreendedorismo.pptx
+++ b/Documentos/Entrega 2/Inovação e Empreendedorismo/Entrega 2 - Inovação e Empreendedorismo.pptx
@@ -202,7 +202,7 @@
           <a:p>
             <a:fld id="{37A7B077-3F8D-0D4F-9563-D0503C86577A}" type="datetimeFigureOut">
               <a:rPr lang="pt-BR" smtClean="0"/>
-              <a:t>29/10/2026</a:t>
+              <a:t>30/10/2026</a:t>
             </a:fld>
             <a:endParaRPr lang="pt-BR"/>
           </a:p>
